--- a/examples/basic.pptx
+++ b/examples/basic.pptx
@@ -3168,7 +3168,7 @@
                 </a:solidFill>
                 <a:latin typeface="Hiragino Sans"/>
               </a:rPr>
-              <a:t>pptx2img — 最初の描画</a:t>
+              <a:t>rhodopsin — 最初の描画</a:t>
             </a:r>
           </a:p>
         </p:txBody>
